--- a/ビズもん_資料請求送付資料.pptx
+++ b/ビズもん_資料請求送付資料.pptx
@@ -6499,7 +6499,7 @@
       </p:sp>
       <p:sp>
         <p:nvSpPr>
-          <p:cNvPr id="10" name="Shape 8"/>
+          <p:cNvPr id="12" name="Shape 10"/>
           <p:cNvSpPr/>
           <p:nvPr/>
         </p:nvSpPr>
@@ -6519,75 +6519,13 @@
       </p:sp>
       <p:sp>
         <p:nvSpPr>
-          <p:cNvPr id="11" name="Text 9"/>
+          <p:cNvPr id="13" name="Text 11"/>
           <p:cNvSpPr/>
           <p:nvPr/>
         </p:nvSpPr>
         <p:spPr>
           <a:xfrm>
             <a:off x="868680" y="2798064"/>
-            <a:ext cx="5623560" cy="603504"/>
-          </a:xfrm>
-          <a:prstGeom prst="rect">
-            <a:avLst/>
-          </a:prstGeom>
-          <a:noFill/>
-          <a:ln/>
-        </p:spPr>
-        <p:txBody>
-          <a:bodyPr wrap="square" rtlCol="0" anchor="t"/>
-          <a:lstStyle/>
-          <a:p>
-            <a:pPr marL="0" indent="0">
-              <a:lnSpc>
-                <a:spcPts val="1550"/>
-              </a:lnSpc>
-              <a:buNone/>
-            </a:pPr>
-            <a:r>
-              <a:rPr lang="en-US" sz="1150" dirty="0">
-                <a:solidFill>
-                  <a:srgbClr val="475569"/>
-                </a:solidFill>
-                <a:latin typeface="BIZ UDPGothic" pitchFamily="34" charset="0"/>
-                <a:ea typeface="BIZ UDPGothic" pitchFamily="34" charset="-122"/>
-                <a:cs typeface="BIZ UDPGothic" pitchFamily="34" charset="-120"/>
-              </a:rPr>
-              <a:t>リマインド設定：曜日・時刻指定の通常リマインドに加え、未回答者だけに届く追加リマインドも設定できる</a:t>
-            </a:r>
-            <a:endParaRPr lang="en-US" sz="1150" dirty="0"/>
-          </a:p>
-        </p:txBody>
-      </p:sp>
-      <p:sp>
-        <p:nvSpPr>
-          <p:cNvPr id="12" name="Shape 10"/>
-          <p:cNvSpPr/>
-          <p:nvPr/>
-        </p:nvSpPr>
-        <p:spPr>
-          <a:xfrm>
-            <a:off x="548640" y="3520440"/>
-            <a:ext cx="164592" cy="164592"/>
-          </a:xfrm>
-          <a:prstGeom prst="ellipse">
-            <a:avLst/>
-          </a:prstGeom>
-          <a:solidFill>
-            <a:srgbClr val="2563EB"/>
-          </a:solidFill>
-          <a:ln/>
-        </p:spPr>
-      </p:sp>
-      <p:sp>
-        <p:nvSpPr>
-          <p:cNvPr id="13" name="Text 11"/>
-          <p:cNvSpPr/>
-          <p:nvPr/>
-        </p:nvSpPr>
-        <p:spPr>
-          <a:xfrm>
-            <a:off x="868680" y="3438144"/>
             <a:ext cx="5623560" cy="603504"/>
           </a:xfrm>
           <a:prstGeom prst="rect">
@@ -6749,7 +6687,7 @@
                 <a:ea typeface="BIZ UDPGothic" pitchFamily="34" charset="-122"/>
                 <a:cs typeface="BIZ UDPGothic" pitchFamily="34" charset="-120"/>
               </a:rPr>
-              <a:t>リマインド設定</a:t>
+              <a:t>各種設定</a:t>
             </a:r>
             <a:endParaRPr lang="en-US" sz="1250" dirty="0"/>
           </a:p>
@@ -6841,426 +6779,255 @@
       </p:sp>
       <p:sp>
         <p:nvSpPr>
-          <p:cNvPr id="21" name="Shape 19"/>
-          <p:cNvSpPr/>
-          <p:nvPr/>
-        </p:nvSpPr>
-        <p:spPr>
-          <a:xfrm>
-            <a:off x="7105541" y="2011680"/>
-            <a:ext cx="274320" cy="274320"/>
-          </a:xfrm>
-          <a:prstGeom prst="ellipse">
-            <a:avLst/>
+          <p:cNvPr id="44" name="Text 42"/>
+          <p:cNvSpPr/>
+          <p:nvPr/>
+        </p:nvSpPr>
+        <p:spPr>
+          <a:xfrm>
+            <a:off x="6720840" y="4471416"/>
+            <a:ext cx="4892040" cy="219456"/>
+          </a:xfrm>
+          <a:prstGeom prst="rect">
+            <a:avLst/>
+          </a:prstGeom>
+          <a:noFill/>
+          <a:ln/>
+        </p:spPr>
+        <p:txBody>
+          <a:bodyPr wrap="square" rtlCol="0" anchor="ctr"/>
+          <a:lstStyle/>
+          <a:p>
+            <a:pPr marL="0" indent="0" algn="r">
+              <a:buNone/>
+            </a:pPr>
+            <a:r>
+              <a:rPr lang="en-US" sz="800" dirty="0">
+                <a:solidFill>
+                  <a:srgbClr val="64748B"/>
+                </a:solidFill>
+                <a:latin typeface="BIZ UDPGothic" pitchFamily="34" charset="0"/>
+                <a:ea typeface="BIZ UDPGothic" pitchFamily="34" charset="-122"/>
+                <a:cs typeface="BIZ UDPGothic" pitchFamily="34" charset="-120"/>
+              </a:rPr>
+              <a:t>※実際の画面イメージです（開発中のUIのため変更となる場合があります）</a:t>
+            </a:r>
+            <a:endParaRPr lang="en-US" sz="800" dirty="0"/>
+          </a:p>
+        </p:txBody>
+      </p:sp>
+      <p:sp>
+        <p:nvSpPr>
+          <p:cNvPr id="45" name="Shape 43"/>
+          <p:cNvSpPr/>
+          <p:nvPr/>
+        </p:nvSpPr>
+        <p:spPr>
+          <a:xfrm>
+            <a:off x="548640" y="4892040"/>
+            <a:ext cx="11064240" cy="1298448"/>
+          </a:xfrm>
+          <a:prstGeom prst="roundRect">
+            <a:avLst>
+              <a:gd name="adj" fmla="val 7042"/>
+            </a:avLst>
           </a:prstGeom>
           <a:solidFill>
-            <a:srgbClr val="2563EB"/>
+            <a:srgbClr val="EFF6FF"/>
           </a:solidFill>
           <a:ln/>
         </p:spPr>
       </p:sp>
       <p:sp>
         <p:nvSpPr>
-          <p:cNvPr id="22" name="Text 20"/>
+          <p:cNvPr id="46" name="Shape 44"/>
+          <p:cNvSpPr/>
+          <p:nvPr/>
+        </p:nvSpPr>
+        <p:spPr>
+          <a:xfrm>
+            <a:off x="749808" y="5074920"/>
+            <a:ext cx="457200" cy="457200"/>
+          </a:xfrm>
+          <a:prstGeom prst="roundRect">
+            <a:avLst>
+              <a:gd name="adj" fmla="val 24000"/>
+            </a:avLst>
+          </a:prstGeom>
+          <a:solidFill>
+            <a:srgbClr val="DBEAFE"/>
+          </a:solidFill>
+          <a:ln/>
+        </p:spPr>
+      </p:sp>
+      <p:sp>
+        <p:nvSpPr>
+          <p:cNvPr id="47" name="Text 45"/>
+          <p:cNvSpPr/>
+          <p:nvPr/>
+        </p:nvSpPr>
+        <p:spPr>
+          <a:xfrm>
+            <a:off x="749808" y="5074920"/>
+            <a:ext cx="457200" cy="457200"/>
+          </a:xfrm>
+          <a:prstGeom prst="rect">
+            <a:avLst/>
+          </a:prstGeom>
+          <a:noFill/>
+          <a:ln/>
+        </p:spPr>
+        <p:txBody>
+          <a:bodyPr wrap="square" lIns="0" tIns="0" rIns="0" bIns="0" rtlCol="0" anchor="ctr"/>
+          <a:lstStyle/>
+          <a:p>
+            <a:pPr marL="0" indent="0" algn="ctr">
+              <a:buNone/>
+            </a:pPr>
+            <a:r>
+              <a:rPr lang="en-US" sz="1200" b="1" dirty="0" err="1">
+                <a:solidFill>
+                  <a:srgbClr val="1D4ED8"/>
+                </a:solidFill>
+                <a:latin typeface="BIZ UDPGothic" pitchFamily="34" charset="0"/>
+                <a:ea typeface="BIZ UDPGothic" pitchFamily="34" charset="-122"/>
+                <a:cs typeface="BIZ UDPGothic" pitchFamily="34" charset="-120"/>
+              </a:rPr>
+              <a:t>気づきの例</a:t>
+            </a:r>
+            <a:endParaRPr lang="en-US" sz="1200" dirty="0"/>
+          </a:p>
+        </p:txBody>
+      </p:sp>
+      <p:sp>
+        <p:nvSpPr>
+          <p:cNvPr id="48" name="Text 46"/>
+          <p:cNvSpPr/>
+          <p:nvPr/>
+        </p:nvSpPr>
+        <p:spPr>
+          <a:xfrm>
+            <a:off x="1408176" y="5038344"/>
+            <a:ext cx="9966960" cy="1005840"/>
+          </a:xfrm>
+          <a:prstGeom prst="rect">
+            <a:avLst/>
+          </a:prstGeom>
+          <a:noFill/>
+          <a:ln/>
+        </p:spPr>
+        <p:txBody>
+          <a:bodyPr wrap="square" rtlCol="0" anchor="ctr"/>
+          <a:lstStyle/>
+          <a:p>
+            <a:pPr marL="0" indent="0">
+              <a:lnSpc>
+                <a:spcPts val="1900"/>
+              </a:lnSpc>
+              <a:buNone/>
+            </a:pPr>
+            <a:r>
+              <a:rPr lang="en-US" sz="1250" dirty="0">
+                <a:solidFill>
+                  <a:srgbClr val="0F172A"/>
+                </a:solidFill>
+                <a:latin typeface="BIZ UDPGothic" pitchFamily="34" charset="0"/>
+                <a:ea typeface="BIZ UDPGothic" pitchFamily="34" charset="-122"/>
+                <a:cs typeface="BIZ UDPGothic" pitchFamily="34" charset="-120"/>
+              </a:rPr>
+              <a:t>出張の多い営業担当は、出張先の天気が分からず身支度に困ることがあった → 天気予報表示地域を出張先の支店に設定 → 出発前に現地の天気を確認でき、雨具の準備や取引先への一言も自然にできるようになった。</a:t>
+            </a:r>
+            <a:endParaRPr lang="en-US" sz="1250" dirty="0"/>
+          </a:p>
+        </p:txBody>
+      </p:sp>
+      <p:sp>
+        <p:nvSpPr>
+          <p:cNvPr id="49" name="Text 47"/>
+          <p:cNvSpPr/>
+          <p:nvPr/>
+        </p:nvSpPr>
+        <p:spPr>
+          <a:xfrm>
+            <a:off x="457200" y="6473952"/>
+            <a:ext cx="3657600" cy="274320"/>
+          </a:xfrm>
+          <a:prstGeom prst="rect">
+            <a:avLst/>
+          </a:prstGeom>
+          <a:noFill/>
+          <a:ln/>
+        </p:spPr>
+        <p:txBody>
+          <a:bodyPr wrap="square" rtlCol="0" anchor="ctr"/>
+          <a:lstStyle/>
+          <a:p>
+            <a:pPr marL="0" indent="0">
+              <a:buNone/>
+            </a:pPr>
+            <a:r>
+              <a:rPr lang="en-US" sz="900" b="1" dirty="0">
+                <a:solidFill>
+                  <a:srgbClr val="64748B"/>
+                </a:solidFill>
+                <a:latin typeface="BIZ UDPGothic" pitchFamily="34" charset="0"/>
+                <a:ea typeface="BIZ UDPGothic" pitchFamily="34" charset="-122"/>
+                <a:cs typeface="BIZ UDPGothic" pitchFamily="34" charset="-120"/>
+              </a:rPr>
+              <a:t>ビズもん</a:t>
+            </a:r>
+            <a:endParaRPr lang="en-US" sz="900" dirty="0"/>
+          </a:p>
+        </p:txBody>
+      </p:sp>
+      <p:sp>
+        <p:nvSpPr>
+          <p:cNvPr id="50" name="Text 48"/>
+          <p:cNvSpPr/>
+          <p:nvPr/>
+        </p:nvSpPr>
+        <p:spPr>
+          <a:xfrm>
+            <a:off x="8076895" y="6473952"/>
+            <a:ext cx="3657600" cy="274320"/>
+          </a:xfrm>
+          <a:prstGeom prst="rect">
+            <a:avLst/>
+          </a:prstGeom>
+          <a:noFill/>
+          <a:ln/>
+        </p:spPr>
+        <p:txBody>
+          <a:bodyPr wrap="square" rtlCol="0" anchor="ctr"/>
+          <a:lstStyle/>
+          <a:p>
+            <a:pPr marL="0" indent="0" algn="r">
+              <a:buNone/>
+            </a:pPr>
+            <a:r>
+              <a:rPr lang="en-US" sz="900" dirty="0">
+                <a:solidFill>
+                  <a:srgbClr val="64748B"/>
+                </a:solidFill>
+                <a:latin typeface="BIZ UDPGothic" pitchFamily="34" charset="0"/>
+                <a:ea typeface="BIZ UDPGothic" pitchFamily="34" charset="-122"/>
+                <a:cs typeface="BIZ UDPGothic" pitchFamily="34" charset="-120"/>
+              </a:rPr>
+              <a:t>12</a:t>
+            </a:r>
+            <a:endParaRPr lang="en-US" sz="900" dirty="0"/>
+          </a:p>
+        </p:txBody>
+      </p:sp>
+      <p:sp>
+        <p:nvSpPr>
+          <p:cNvPr id="60" name="Shape 60"/>
           <p:cNvSpPr/>
           <p:nvPr/>
         </p:nvSpPr>
         <p:spPr>
           <a:xfrm>
             <a:off x="6922008" y="2011680"/>
-            <a:ext cx="641386" cy="274320"/>
-          </a:xfrm>
-          <a:prstGeom prst="rect">
-            <a:avLst/>
-          </a:prstGeom>
-          <a:noFill/>
-          <a:ln/>
-        </p:spPr>
-        <p:txBody>
-          <a:bodyPr wrap="square" lIns="0" tIns="0" rIns="0" bIns="0" rtlCol="0" anchor="ctr"/>
-          <a:lstStyle/>
-          <a:p>
-            <a:pPr marL="0" indent="0" algn="ctr">
-              <a:buNone/>
-            </a:pPr>
-            <a:r>
-              <a:rPr lang="en-US" sz="900" b="1" dirty="0">
-                <a:solidFill>
-                  <a:srgbClr val="FFFFFF"/>
-                </a:solidFill>
-                <a:latin typeface="BIZ UDPGothic" pitchFamily="34" charset="0"/>
-                <a:ea typeface="BIZ UDPGothic" pitchFamily="34" charset="-122"/>
-                <a:cs typeface="BIZ UDPGothic" pitchFamily="34" charset="-120"/>
-              </a:rPr>
-              <a:t>月</a:t>
-            </a:r>
-            <a:endParaRPr lang="en-US" sz="900" dirty="0"/>
-          </a:p>
-        </p:txBody>
-      </p:sp>
-      <p:sp>
-        <p:nvSpPr>
-          <p:cNvPr id="23" name="Shape 21"/>
-          <p:cNvSpPr/>
-          <p:nvPr/>
-        </p:nvSpPr>
-        <p:spPr>
-          <a:xfrm>
-            <a:off x="7746927" y="2011680"/>
-            <a:ext cx="274320" cy="274320"/>
-          </a:xfrm>
-          <a:prstGeom prst="ellipse">
-            <a:avLst/>
-          </a:prstGeom>
-          <a:solidFill>
-            <a:srgbClr val="2563EB"/>
-          </a:solidFill>
-          <a:ln/>
-        </p:spPr>
-      </p:sp>
-      <p:sp>
-        <p:nvSpPr>
-          <p:cNvPr id="24" name="Text 22"/>
-          <p:cNvSpPr/>
-          <p:nvPr/>
-        </p:nvSpPr>
-        <p:spPr>
-          <a:xfrm>
-            <a:off x="7563394" y="2011680"/>
-            <a:ext cx="641386" cy="274320"/>
-          </a:xfrm>
-          <a:prstGeom prst="rect">
-            <a:avLst/>
-          </a:prstGeom>
-          <a:noFill/>
-          <a:ln/>
-        </p:spPr>
-        <p:txBody>
-          <a:bodyPr wrap="square" lIns="0" tIns="0" rIns="0" bIns="0" rtlCol="0" anchor="ctr"/>
-          <a:lstStyle/>
-          <a:p>
-            <a:pPr marL="0" indent="0" algn="ctr">
-              <a:buNone/>
-            </a:pPr>
-            <a:r>
-              <a:rPr lang="en-US" sz="900" b="1" dirty="0">
-                <a:solidFill>
-                  <a:srgbClr val="FFFFFF"/>
-                </a:solidFill>
-                <a:latin typeface="BIZ UDPGothic" pitchFamily="34" charset="0"/>
-                <a:ea typeface="BIZ UDPGothic" pitchFamily="34" charset="-122"/>
-                <a:cs typeface="BIZ UDPGothic" pitchFamily="34" charset="-120"/>
-              </a:rPr>
-              <a:t>火</a:t>
-            </a:r>
-            <a:endParaRPr lang="en-US" sz="900" dirty="0"/>
-          </a:p>
-        </p:txBody>
-      </p:sp>
-      <p:sp>
-        <p:nvSpPr>
-          <p:cNvPr id="25" name="Shape 23"/>
-          <p:cNvSpPr/>
-          <p:nvPr/>
-        </p:nvSpPr>
-        <p:spPr>
-          <a:xfrm>
-            <a:off x="8388314" y="2011680"/>
-            <a:ext cx="274320" cy="274320"/>
-          </a:xfrm>
-          <a:prstGeom prst="ellipse">
-            <a:avLst/>
-          </a:prstGeom>
-          <a:solidFill>
-            <a:srgbClr val="2563EB"/>
-          </a:solidFill>
-          <a:ln/>
-        </p:spPr>
-      </p:sp>
-      <p:sp>
-        <p:nvSpPr>
-          <p:cNvPr id="26" name="Text 24"/>
-          <p:cNvSpPr/>
-          <p:nvPr/>
-        </p:nvSpPr>
-        <p:spPr>
-          <a:xfrm>
-            <a:off x="8204781" y="2011680"/>
-            <a:ext cx="641386" cy="274320"/>
-          </a:xfrm>
-          <a:prstGeom prst="rect">
-            <a:avLst/>
-          </a:prstGeom>
-          <a:noFill/>
-          <a:ln/>
-        </p:spPr>
-        <p:txBody>
-          <a:bodyPr wrap="square" lIns="0" tIns="0" rIns="0" bIns="0" rtlCol="0" anchor="ctr"/>
-          <a:lstStyle/>
-          <a:p>
-            <a:pPr marL="0" indent="0" algn="ctr">
-              <a:buNone/>
-            </a:pPr>
-            <a:r>
-              <a:rPr lang="en-US" sz="900" b="1" dirty="0">
-                <a:solidFill>
-                  <a:srgbClr val="FFFFFF"/>
-                </a:solidFill>
-                <a:latin typeface="BIZ UDPGothic" pitchFamily="34" charset="0"/>
-                <a:ea typeface="BIZ UDPGothic" pitchFamily="34" charset="-122"/>
-                <a:cs typeface="BIZ UDPGothic" pitchFamily="34" charset="-120"/>
-              </a:rPr>
-              <a:t>水</a:t>
-            </a:r>
-            <a:endParaRPr lang="en-US" sz="900" dirty="0"/>
-          </a:p>
-        </p:txBody>
-      </p:sp>
-      <p:sp>
-        <p:nvSpPr>
-          <p:cNvPr id="27" name="Shape 25"/>
-          <p:cNvSpPr/>
-          <p:nvPr/>
-        </p:nvSpPr>
-        <p:spPr>
-          <a:xfrm>
-            <a:off x="9029700" y="2011680"/>
-            <a:ext cx="274320" cy="274320"/>
-          </a:xfrm>
-          <a:prstGeom prst="ellipse">
-            <a:avLst/>
-          </a:prstGeom>
-          <a:solidFill>
-            <a:srgbClr val="2563EB"/>
-          </a:solidFill>
-          <a:ln/>
-        </p:spPr>
-      </p:sp>
-      <p:sp>
-        <p:nvSpPr>
-          <p:cNvPr id="28" name="Text 26"/>
-          <p:cNvSpPr/>
-          <p:nvPr/>
-        </p:nvSpPr>
-        <p:spPr>
-          <a:xfrm>
-            <a:off x="8846167" y="2011680"/>
-            <a:ext cx="641386" cy="274320"/>
-          </a:xfrm>
-          <a:prstGeom prst="rect">
-            <a:avLst/>
-          </a:prstGeom>
-          <a:noFill/>
-          <a:ln/>
-        </p:spPr>
-        <p:txBody>
-          <a:bodyPr wrap="square" lIns="0" tIns="0" rIns="0" bIns="0" rtlCol="0" anchor="ctr"/>
-          <a:lstStyle/>
-          <a:p>
-            <a:pPr marL="0" indent="0" algn="ctr">
-              <a:buNone/>
-            </a:pPr>
-            <a:r>
-              <a:rPr lang="en-US" sz="900" b="1" dirty="0">
-                <a:solidFill>
-                  <a:srgbClr val="FFFFFF"/>
-                </a:solidFill>
-                <a:latin typeface="BIZ UDPGothic" pitchFamily="34" charset="0"/>
-                <a:ea typeface="BIZ UDPGothic" pitchFamily="34" charset="-122"/>
-                <a:cs typeface="BIZ UDPGothic" pitchFamily="34" charset="-120"/>
-              </a:rPr>
-              <a:t>木</a:t>
-            </a:r>
-            <a:endParaRPr lang="en-US" sz="900" dirty="0"/>
-          </a:p>
-        </p:txBody>
-      </p:sp>
-      <p:sp>
-        <p:nvSpPr>
-          <p:cNvPr id="29" name="Shape 27"/>
-          <p:cNvSpPr/>
-          <p:nvPr/>
-        </p:nvSpPr>
-        <p:spPr>
-          <a:xfrm>
-            <a:off x="9671086" y="2011680"/>
-            <a:ext cx="274320" cy="274320"/>
-          </a:xfrm>
-          <a:prstGeom prst="ellipse">
-            <a:avLst/>
-          </a:prstGeom>
-          <a:solidFill>
-            <a:srgbClr val="2563EB"/>
-          </a:solidFill>
-          <a:ln/>
-        </p:spPr>
-      </p:sp>
-      <p:sp>
-        <p:nvSpPr>
-          <p:cNvPr id="30" name="Text 28"/>
-          <p:cNvSpPr/>
-          <p:nvPr/>
-        </p:nvSpPr>
-        <p:spPr>
-          <a:xfrm>
-            <a:off x="9487553" y="2011680"/>
-            <a:ext cx="641386" cy="274320"/>
-          </a:xfrm>
-          <a:prstGeom prst="rect">
-            <a:avLst/>
-          </a:prstGeom>
-          <a:noFill/>
-          <a:ln/>
-        </p:spPr>
-        <p:txBody>
-          <a:bodyPr wrap="square" lIns="0" tIns="0" rIns="0" bIns="0" rtlCol="0" anchor="ctr"/>
-          <a:lstStyle/>
-          <a:p>
-            <a:pPr marL="0" indent="0" algn="ctr">
-              <a:buNone/>
-            </a:pPr>
-            <a:r>
-              <a:rPr lang="en-US" sz="900" b="1" dirty="0">
-                <a:solidFill>
-                  <a:srgbClr val="FFFFFF"/>
-                </a:solidFill>
-                <a:latin typeface="BIZ UDPGothic" pitchFamily="34" charset="0"/>
-                <a:ea typeface="BIZ UDPGothic" pitchFamily="34" charset="-122"/>
-                <a:cs typeface="BIZ UDPGothic" pitchFamily="34" charset="-120"/>
-              </a:rPr>
-              <a:t>金</a:t>
-            </a:r>
-            <a:endParaRPr lang="en-US" sz="900" dirty="0"/>
-          </a:p>
-        </p:txBody>
-      </p:sp>
-      <p:sp>
-        <p:nvSpPr>
-          <p:cNvPr id="31" name="Shape 29"/>
-          <p:cNvSpPr/>
-          <p:nvPr/>
-        </p:nvSpPr>
-        <p:spPr>
-          <a:xfrm>
-            <a:off x="10312473" y="2011680"/>
-            <a:ext cx="274320" cy="274320"/>
-          </a:xfrm>
-          <a:prstGeom prst="ellipse">
-            <a:avLst/>
-          </a:prstGeom>
-          <a:solidFill>
-            <a:srgbClr val="F1F5F9"/>
-          </a:solidFill>
-          <a:ln/>
-        </p:spPr>
-      </p:sp>
-      <p:sp>
-        <p:nvSpPr>
-          <p:cNvPr id="32" name="Text 30"/>
-          <p:cNvSpPr/>
-          <p:nvPr/>
-        </p:nvSpPr>
-        <p:spPr>
-          <a:xfrm>
-            <a:off x="10128939" y="2011680"/>
-            <a:ext cx="641386" cy="274320"/>
-          </a:xfrm>
-          <a:prstGeom prst="rect">
-            <a:avLst/>
-          </a:prstGeom>
-          <a:noFill/>
-          <a:ln/>
-        </p:spPr>
-        <p:txBody>
-          <a:bodyPr wrap="square" lIns="0" tIns="0" rIns="0" bIns="0" rtlCol="0" anchor="ctr"/>
-          <a:lstStyle/>
-          <a:p>
-            <a:pPr marL="0" indent="0" algn="ctr">
-              <a:buNone/>
-            </a:pPr>
-            <a:r>
-              <a:rPr lang="en-US" sz="900" b="1" dirty="0">
-                <a:solidFill>
-                  <a:srgbClr val="64748B"/>
-                </a:solidFill>
-                <a:latin typeface="BIZ UDPGothic" pitchFamily="34" charset="0"/>
-                <a:ea typeface="BIZ UDPGothic" pitchFamily="34" charset="-122"/>
-                <a:cs typeface="BIZ UDPGothic" pitchFamily="34" charset="-120"/>
-              </a:rPr>
-              <a:t>土</a:t>
-            </a:r>
-            <a:endParaRPr lang="en-US" sz="900" dirty="0"/>
-          </a:p>
-        </p:txBody>
-      </p:sp>
-      <p:sp>
-        <p:nvSpPr>
-          <p:cNvPr id="33" name="Shape 31"/>
-          <p:cNvSpPr/>
-          <p:nvPr/>
-        </p:nvSpPr>
-        <p:spPr>
-          <a:xfrm>
-            <a:off x="10953859" y="2011680"/>
-            <a:ext cx="274320" cy="274320"/>
-          </a:xfrm>
-          <a:prstGeom prst="ellipse">
-            <a:avLst/>
-          </a:prstGeom>
-          <a:solidFill>
-            <a:srgbClr val="F1F5F9"/>
-          </a:solidFill>
-          <a:ln/>
-        </p:spPr>
-      </p:sp>
-      <p:sp>
-        <p:nvSpPr>
-          <p:cNvPr id="34" name="Text 32"/>
-          <p:cNvSpPr/>
-          <p:nvPr/>
-        </p:nvSpPr>
-        <p:spPr>
-          <a:xfrm>
-            <a:off x="10770326" y="2011680"/>
-            <a:ext cx="641386" cy="274320"/>
-          </a:xfrm>
-          <a:prstGeom prst="rect">
-            <a:avLst/>
-          </a:prstGeom>
-          <a:noFill/>
-          <a:ln/>
-        </p:spPr>
-        <p:txBody>
-          <a:bodyPr wrap="square" lIns="0" tIns="0" rIns="0" bIns="0" rtlCol="0" anchor="ctr"/>
-          <a:lstStyle/>
-          <a:p>
-            <a:pPr marL="0" indent="0" algn="ctr">
-              <a:buNone/>
-            </a:pPr>
-            <a:r>
-              <a:rPr lang="en-US" sz="900" b="1" dirty="0">
-                <a:solidFill>
-                  <a:srgbClr val="64748B"/>
-                </a:solidFill>
-                <a:latin typeface="BIZ UDPGothic" pitchFamily="34" charset="0"/>
-                <a:ea typeface="BIZ UDPGothic" pitchFamily="34" charset="-122"/>
-                <a:cs typeface="BIZ UDPGothic" pitchFamily="34" charset="-120"/>
-              </a:rPr>
-              <a:t>日</a:t>
-            </a:r>
-            <a:endParaRPr lang="en-US" sz="900" dirty="0"/>
-          </a:p>
-        </p:txBody>
-      </p:sp>
-      <p:sp>
-        <p:nvSpPr>
-          <p:cNvPr id="35" name="Shape 33"/>
-          <p:cNvSpPr/>
-          <p:nvPr/>
-        </p:nvSpPr>
-        <p:spPr>
-          <a:xfrm>
-            <a:off x="6922008" y="2432304"/>
             <a:ext cx="4489704" cy="457200"/>
           </a:xfrm>
           <a:prstGeom prst="roundRect">
@@ -7276,14 +7043,14 @@
       </p:sp>
       <p:sp>
         <p:nvSpPr>
-          <p:cNvPr id="36" name="Text 34"/>
-          <p:cNvSpPr/>
-          <p:nvPr/>
-        </p:nvSpPr>
-        <p:spPr>
-          <a:xfrm>
-            <a:off x="7031736" y="2432304"/>
-            <a:ext cx="3849624" cy="457200"/>
+          <p:cNvPr id="61" name="Text 61"/>
+          <p:cNvSpPr/>
+          <p:nvPr/>
+        </p:nvSpPr>
+        <p:spPr>
+          <a:xfrm>
+            <a:off x="7031736" y="2011680"/>
+            <a:ext cx="4300000" cy="457200"/>
           </a:xfrm>
           <a:prstGeom prst="rect">
             <a:avLst/>
@@ -7307,7 +7074,7 @@
                 <a:ea typeface="BIZ UDPGothic" pitchFamily="34" charset="-122"/>
                 <a:cs typeface="BIZ UDPGothic" pitchFamily="34" charset="-120"/>
               </a:rPr>
-              <a:t>通常リマインド　平日 8:00</a:t>
+              <a:t>アカウント設定：メールアドレス・パスワードの変更</a:t>
             </a:r>
             <a:endParaRPr lang="en-US" sz="950" dirty="0"/>
           </a:p>
@@ -7315,55 +7082,13 @@
       </p:sp>
       <p:sp>
         <p:nvSpPr>
-          <p:cNvPr id="37" name="Shape 35"/>
-          <p:cNvSpPr/>
-          <p:nvPr/>
-        </p:nvSpPr>
-        <p:spPr>
-          <a:xfrm>
-            <a:off x="10954512" y="2542032"/>
-            <a:ext cx="384048" cy="201168"/>
-          </a:xfrm>
-          <a:prstGeom prst="roundRect">
-            <a:avLst>
-              <a:gd name="adj" fmla="val 50000"/>
-            </a:avLst>
-          </a:prstGeom>
-          <a:solidFill>
-            <a:srgbClr val="2563EB"/>
-          </a:solidFill>
-          <a:ln/>
-        </p:spPr>
-      </p:sp>
-      <p:sp>
-        <p:nvSpPr>
-          <p:cNvPr id="38" name="Shape 36"/>
-          <p:cNvSpPr/>
-          <p:nvPr/>
-        </p:nvSpPr>
-        <p:spPr>
-          <a:xfrm>
-            <a:off x="11137392" y="2542032"/>
-            <a:ext cx="201168" cy="201168"/>
-          </a:xfrm>
-          <a:prstGeom prst="ellipse">
-            <a:avLst/>
-          </a:prstGeom>
-          <a:solidFill>
-            <a:srgbClr val="FFFFFF"/>
-          </a:solidFill>
-          <a:ln/>
-        </p:spPr>
-      </p:sp>
-      <p:sp>
-        <p:nvSpPr>
-          <p:cNvPr id="39" name="Shape 37"/>
-          <p:cNvSpPr/>
-          <p:nvPr/>
-        </p:nvSpPr>
-        <p:spPr>
-          <a:xfrm>
-            <a:off x="6922008" y="2980944"/>
+          <p:cNvPr id="62" name="Shape 62"/>
+          <p:cNvSpPr/>
+          <p:nvPr/>
+        </p:nvSpPr>
+        <p:spPr>
+          <a:xfrm>
+            <a:off x="6922008" y="2560320"/>
             <a:ext cx="4489704" cy="457200"/>
           </a:xfrm>
           <a:prstGeom prst="roundRect">
@@ -7372,21 +7097,21 @@
             </a:avLst>
           </a:prstGeom>
           <a:solidFill>
-            <a:srgbClr val="FFEDD5"/>
+            <a:srgbClr val="F5F7FB"/>
           </a:solidFill>
           <a:ln/>
         </p:spPr>
       </p:sp>
       <p:sp>
         <p:nvSpPr>
-          <p:cNvPr id="40" name="Text 38"/>
-          <p:cNvSpPr/>
-          <p:nvPr/>
-        </p:nvSpPr>
-        <p:spPr>
-          <a:xfrm>
-            <a:off x="7031736" y="2980944"/>
-            <a:ext cx="3849624" cy="457200"/>
+          <p:cNvPr id="63" name="Text 63"/>
+          <p:cNvSpPr/>
+          <p:nvPr/>
+        </p:nvSpPr>
+        <p:spPr>
+          <a:xfrm>
+            <a:off x="7031736" y="2560320"/>
+            <a:ext cx="4300000" cy="457200"/>
           </a:xfrm>
           <a:prstGeom prst="rect">
             <a:avLst/>
@@ -7402,15 +7127,15 @@
               <a:buNone/>
             </a:pPr>
             <a:r>
-              <a:rPr lang="en-US" sz="950" b="1" dirty="0">
-                <a:solidFill>
-                  <a:srgbClr val="9A3412"/>
-                </a:solidFill>
-                <a:latin typeface="BIZ UDPGothic" pitchFamily="34" charset="0"/>
-                <a:ea typeface="BIZ UDPGothic" pitchFamily="34" charset="-122"/>
-                <a:cs typeface="BIZ UDPGothic" pitchFamily="34" charset="-120"/>
-              </a:rPr>
-              <a:t>追加リマインド　未回答のみ 17:00</a:t>
+              <a:rPr lang="en-US" sz="950" dirty="0">
+                <a:solidFill>
+                  <a:srgbClr val="0F172A"/>
+                </a:solidFill>
+                <a:latin typeface="BIZ UDPGothic" pitchFamily="34" charset="0"/>
+                <a:ea typeface="BIZ UDPGothic" pitchFamily="34" charset="-122"/>
+                <a:cs typeface="BIZ UDPGothic" pitchFamily="34" charset="-120"/>
+              </a:rPr>
+              <a:t>天気予報表示地域：千葉県千葉市</a:t>
             </a:r>
             <a:endParaRPr lang="en-US" sz="950" dirty="0"/>
           </a:p>
@@ -7418,65 +7143,23 @@
       </p:sp>
       <p:sp>
         <p:nvSpPr>
-          <p:cNvPr id="41" name="Shape 39"/>
-          <p:cNvSpPr/>
-          <p:nvPr/>
-        </p:nvSpPr>
-        <p:spPr>
-          <a:xfrm>
-            <a:off x="10954512" y="3090672"/>
-            <a:ext cx="384048" cy="201168"/>
-          </a:xfrm>
-          <a:prstGeom prst="roundRect">
-            <a:avLst>
-              <a:gd name="adj" fmla="val 50000"/>
-            </a:avLst>
-          </a:prstGeom>
-          <a:solidFill>
-            <a:srgbClr val="2563EB"/>
-          </a:solidFill>
-          <a:ln/>
-        </p:spPr>
-      </p:sp>
-      <p:sp>
-        <p:nvSpPr>
-          <p:cNvPr id="42" name="Shape 40"/>
-          <p:cNvSpPr/>
-          <p:nvPr/>
-        </p:nvSpPr>
-        <p:spPr>
-          <a:xfrm>
-            <a:off x="11137392" y="3090672"/>
-            <a:ext cx="201168" cy="201168"/>
-          </a:xfrm>
-          <a:prstGeom prst="ellipse">
-            <a:avLst/>
-          </a:prstGeom>
-          <a:solidFill>
-            <a:srgbClr val="FFFFFF"/>
-          </a:solidFill>
-          <a:ln/>
-        </p:spPr>
-      </p:sp>
-      <p:sp>
-        <p:nvSpPr>
-          <p:cNvPr id="43" name="Text 41"/>
-          <p:cNvSpPr/>
-          <p:nvPr/>
-        </p:nvSpPr>
-        <p:spPr>
-          <a:xfrm>
-            <a:off x="6922008" y="3566160"/>
-            <a:ext cx="4489704" cy="237744"/>
-          </a:xfrm>
-          <a:prstGeom prst="rect">
-            <a:avLst/>
-          </a:prstGeom>
-          <a:noFill/>
-          <a:ln/>
-        </p:spPr>
-        <p:txBody>
-          <a:bodyPr wrap="square" rtlCol="0" anchor="ctr"/>
+          <p:cNvPr id="64" name="Text 64"/>
+          <p:cNvSpPr/>
+          <p:nvPr/>
+        </p:nvSpPr>
+        <p:spPr>
+          <a:xfrm>
+            <a:off x="6922008" y="3200400"/>
+            <a:ext cx="4489704" cy="420000"/>
+          </a:xfrm>
+          <a:prstGeom prst="rect">
+            <a:avLst/>
+          </a:prstGeom>
+          <a:noFill/>
+          <a:ln/>
+        </p:spPr>
+        <p:txBody>
+          <a:bodyPr wrap="square" rtlCol="0" anchor="t"/>
           <a:lstStyle/>
           <a:p>
             <a:pPr marL="0" indent="0">
@@ -7491,251 +7174,9 @@
                 <a:ea typeface="BIZ UDPGothic" pitchFamily="34" charset="-122"/>
                 <a:cs typeface="BIZ UDPGothic" pitchFamily="34" charset="-120"/>
               </a:rPr>
-              <a:t>天気予報表示地域：千葉県千葉市</a:t>
+              <a:t>※メール・パスワードの変更には本人確認（現在のパスワード入力）が必要です</a:t>
             </a:r>
             <a:endParaRPr lang="en-US" sz="850" dirty="0"/>
-          </a:p>
-        </p:txBody>
-      </p:sp>
-      <p:sp>
-        <p:nvSpPr>
-          <p:cNvPr id="44" name="Text 42"/>
-          <p:cNvSpPr/>
-          <p:nvPr/>
-        </p:nvSpPr>
-        <p:spPr>
-          <a:xfrm>
-            <a:off x="6720840" y="4471416"/>
-            <a:ext cx="4892040" cy="219456"/>
-          </a:xfrm>
-          <a:prstGeom prst="rect">
-            <a:avLst/>
-          </a:prstGeom>
-          <a:noFill/>
-          <a:ln/>
-        </p:spPr>
-        <p:txBody>
-          <a:bodyPr wrap="square" rtlCol="0" anchor="ctr"/>
-          <a:lstStyle/>
-          <a:p>
-            <a:pPr marL="0" indent="0" algn="r">
-              <a:buNone/>
-            </a:pPr>
-            <a:r>
-              <a:rPr lang="en-US" sz="800" dirty="0">
-                <a:solidFill>
-                  <a:srgbClr val="64748B"/>
-                </a:solidFill>
-                <a:latin typeface="BIZ UDPGothic" pitchFamily="34" charset="0"/>
-                <a:ea typeface="BIZ UDPGothic" pitchFamily="34" charset="-122"/>
-                <a:cs typeface="BIZ UDPGothic" pitchFamily="34" charset="-120"/>
-              </a:rPr>
-              <a:t>※実際の画面イメージです（開発中のUIのため変更となる場合があります）</a:t>
-            </a:r>
-            <a:endParaRPr lang="en-US" sz="800" dirty="0"/>
-          </a:p>
-        </p:txBody>
-      </p:sp>
-      <p:sp>
-        <p:nvSpPr>
-          <p:cNvPr id="45" name="Shape 43"/>
-          <p:cNvSpPr/>
-          <p:nvPr/>
-        </p:nvSpPr>
-        <p:spPr>
-          <a:xfrm>
-            <a:off x="548640" y="4892040"/>
-            <a:ext cx="11064240" cy="1298448"/>
-          </a:xfrm>
-          <a:prstGeom prst="roundRect">
-            <a:avLst>
-              <a:gd name="adj" fmla="val 7042"/>
-            </a:avLst>
-          </a:prstGeom>
-          <a:solidFill>
-            <a:srgbClr val="EFF6FF"/>
-          </a:solidFill>
-          <a:ln/>
-        </p:spPr>
-      </p:sp>
-      <p:sp>
-        <p:nvSpPr>
-          <p:cNvPr id="46" name="Shape 44"/>
-          <p:cNvSpPr/>
-          <p:nvPr/>
-        </p:nvSpPr>
-        <p:spPr>
-          <a:xfrm>
-            <a:off x="749808" y="5074920"/>
-            <a:ext cx="457200" cy="457200"/>
-          </a:xfrm>
-          <a:prstGeom prst="roundRect">
-            <a:avLst>
-              <a:gd name="adj" fmla="val 24000"/>
-            </a:avLst>
-          </a:prstGeom>
-          <a:solidFill>
-            <a:srgbClr val="DBEAFE"/>
-          </a:solidFill>
-          <a:ln/>
-        </p:spPr>
-      </p:sp>
-      <p:sp>
-        <p:nvSpPr>
-          <p:cNvPr id="47" name="Text 45"/>
-          <p:cNvSpPr/>
-          <p:nvPr/>
-        </p:nvSpPr>
-        <p:spPr>
-          <a:xfrm>
-            <a:off x="749808" y="5074920"/>
-            <a:ext cx="457200" cy="457200"/>
-          </a:xfrm>
-          <a:prstGeom prst="rect">
-            <a:avLst/>
-          </a:prstGeom>
-          <a:noFill/>
-          <a:ln/>
-        </p:spPr>
-        <p:txBody>
-          <a:bodyPr wrap="square" lIns="0" tIns="0" rIns="0" bIns="0" rtlCol="0" anchor="ctr"/>
-          <a:lstStyle/>
-          <a:p>
-            <a:pPr marL="0" indent="0" algn="ctr">
-              <a:buNone/>
-            </a:pPr>
-            <a:r>
-              <a:rPr lang="en-US" sz="1200" b="1" dirty="0" err="1">
-                <a:solidFill>
-                  <a:srgbClr val="1D4ED8"/>
-                </a:solidFill>
-                <a:latin typeface="BIZ UDPGothic" pitchFamily="34" charset="0"/>
-                <a:ea typeface="BIZ UDPGothic" pitchFamily="34" charset="-122"/>
-                <a:cs typeface="BIZ UDPGothic" pitchFamily="34" charset="-120"/>
-              </a:rPr>
-              <a:t>気づきの例</a:t>
-            </a:r>
-            <a:endParaRPr lang="en-US" sz="1200" dirty="0"/>
-          </a:p>
-        </p:txBody>
-      </p:sp>
-      <p:sp>
-        <p:nvSpPr>
-          <p:cNvPr id="48" name="Text 46"/>
-          <p:cNvSpPr/>
-          <p:nvPr/>
-        </p:nvSpPr>
-        <p:spPr>
-          <a:xfrm>
-            <a:off x="1408176" y="5038344"/>
-            <a:ext cx="9966960" cy="1005840"/>
-          </a:xfrm>
-          <a:prstGeom prst="rect">
-            <a:avLst/>
-          </a:prstGeom>
-          <a:noFill/>
-          <a:ln/>
-        </p:spPr>
-        <p:txBody>
-          <a:bodyPr wrap="square" rtlCol="0" anchor="ctr"/>
-          <a:lstStyle/>
-          <a:p>
-            <a:pPr marL="0" indent="0">
-              <a:lnSpc>
-                <a:spcPts val="1900"/>
-              </a:lnSpc>
-              <a:buNone/>
-            </a:pPr>
-            <a:r>
-              <a:rPr lang="en-US" sz="1250" dirty="0">
-                <a:solidFill>
-                  <a:srgbClr val="0F172A"/>
-                </a:solidFill>
-                <a:latin typeface="BIZ UDPGothic" pitchFamily="34" charset="0"/>
-                <a:ea typeface="BIZ UDPGothic" pitchFamily="34" charset="-122"/>
-                <a:cs typeface="BIZ UDPGothic" pitchFamily="34" charset="-120"/>
-              </a:rPr>
-              <a:t>毎日のクイズをつい忘れてしまう社員がいる → 未回答の場合だけ届く「追加リマインド」を設定 → 「忘れていたけど、届いたから答えた」の積み重ねで、回答率と継続率が底上げされる。</a:t>
-            </a:r>
-            <a:endParaRPr lang="en-US" sz="1250" dirty="0"/>
-          </a:p>
-        </p:txBody>
-      </p:sp>
-      <p:sp>
-        <p:nvSpPr>
-          <p:cNvPr id="49" name="Text 47"/>
-          <p:cNvSpPr/>
-          <p:nvPr/>
-        </p:nvSpPr>
-        <p:spPr>
-          <a:xfrm>
-            <a:off x="457200" y="6473952"/>
-            <a:ext cx="3657600" cy="274320"/>
-          </a:xfrm>
-          <a:prstGeom prst="rect">
-            <a:avLst/>
-          </a:prstGeom>
-          <a:noFill/>
-          <a:ln/>
-        </p:spPr>
-        <p:txBody>
-          <a:bodyPr wrap="square" rtlCol="0" anchor="ctr"/>
-          <a:lstStyle/>
-          <a:p>
-            <a:pPr marL="0" indent="0">
-              <a:buNone/>
-            </a:pPr>
-            <a:r>
-              <a:rPr lang="en-US" sz="900" b="1" dirty="0">
-                <a:solidFill>
-                  <a:srgbClr val="64748B"/>
-                </a:solidFill>
-                <a:latin typeface="BIZ UDPGothic" pitchFamily="34" charset="0"/>
-                <a:ea typeface="BIZ UDPGothic" pitchFamily="34" charset="-122"/>
-                <a:cs typeface="BIZ UDPGothic" pitchFamily="34" charset="-120"/>
-              </a:rPr>
-              <a:t>ビズもん</a:t>
-            </a:r>
-            <a:endParaRPr lang="en-US" sz="900" dirty="0"/>
-          </a:p>
-        </p:txBody>
-      </p:sp>
-      <p:sp>
-        <p:nvSpPr>
-          <p:cNvPr id="50" name="Text 48"/>
-          <p:cNvSpPr/>
-          <p:nvPr/>
-        </p:nvSpPr>
-        <p:spPr>
-          <a:xfrm>
-            <a:off x="8076895" y="6473952"/>
-            <a:ext cx="3657600" cy="274320"/>
-          </a:xfrm>
-          <a:prstGeom prst="rect">
-            <a:avLst/>
-          </a:prstGeom>
-          <a:noFill/>
-          <a:ln/>
-        </p:spPr>
-        <p:txBody>
-          <a:bodyPr wrap="square" rtlCol="0" anchor="ctr"/>
-          <a:lstStyle/>
-          <a:p>
-            <a:pPr marL="0" indent="0" algn="r">
-              <a:buNone/>
-            </a:pPr>
-            <a:r>
-              <a:rPr lang="en-US" sz="900" dirty="0">
-                <a:solidFill>
-                  <a:srgbClr val="64748B"/>
-                </a:solidFill>
-                <a:latin typeface="BIZ UDPGothic" pitchFamily="34" charset="0"/>
-                <a:ea typeface="BIZ UDPGothic" pitchFamily="34" charset="-122"/>
-                <a:cs typeface="BIZ UDPGothic" pitchFamily="34" charset="-120"/>
-              </a:rPr>
-              <a:t>12</a:t>
-            </a:r>
-            <a:endParaRPr lang="en-US" sz="900" dirty="0"/>
           </a:p>
         </p:txBody>
       </p:sp>
